--- a/Powerpoint/Flask-Multi-Tools Webpage.pptx
+++ b/Powerpoint/Flask-Multi-Tools Webpage.pptx
@@ -3084,6 +3084,107 @@
           <a:chExt cx="0" cy="0"/>
         </a:xfrm>
       </p:grpSpPr>
+      <p:cxnSp>
+        <p:nvCxnSpPr>
+          <p:cNvPr id="54" name="Connector: Elbow 53">
+            <a:extLst>
+              <a:ext uri="{FF2B5EF4-FFF2-40B4-BE49-F238E27FC236}">
+                <a16:creationId xmlns:a16="http://schemas.microsoft.com/office/drawing/2014/main" id="{794B37FA-CE21-4DCF-C914-8D79AF5FBF37}"/>
+              </a:ext>
+            </a:extLst>
+          </p:cNvPr>
+          <p:cNvCxnSpPr>
+            <a:cxnSpLocks/>
+            <a:endCxn id="14" idx="1"/>
+          </p:cNvCxnSpPr>
+          <p:nvPr/>
+        </p:nvCxnSpPr>
+        <p:spPr>
+          <a:xfrm rot="5400000" flipH="1" flipV="1">
+            <a:off x="-56538" y="3706732"/>
+            <a:ext cx="2048075" cy="473681"/>
+          </a:xfrm>
+          <a:prstGeom prst="bentConnector2">
+            <a:avLst/>
+          </a:prstGeom>
+          <a:ln>
+            <a:solidFill>
+              <a:srgbClr val="00B050"/>
+            </a:solidFill>
+          </a:ln>
+          <a:effectLst>
+            <a:innerShdw blurRad="63500" dist="50800" dir="16200000">
+              <a:prstClr val="black">
+                <a:alpha val="50000"/>
+              </a:prstClr>
+            </a:innerShdw>
+          </a:effectLst>
+        </p:spPr>
+        <p:style>
+          <a:lnRef idx="3">
+            <a:schemeClr val="accent3"/>
+          </a:lnRef>
+          <a:fillRef idx="0">
+            <a:schemeClr val="accent3"/>
+          </a:fillRef>
+          <a:effectRef idx="2">
+            <a:schemeClr val="accent3"/>
+          </a:effectRef>
+          <a:fontRef idx="minor">
+            <a:schemeClr val="tx1"/>
+          </a:fontRef>
+        </p:style>
+      </p:cxnSp>
+      <p:cxnSp>
+        <p:nvCxnSpPr>
+          <p:cNvPr id="48" name="Straight Connector 47">
+            <a:extLst>
+              <a:ext uri="{FF2B5EF4-FFF2-40B4-BE49-F238E27FC236}">
+                <a16:creationId xmlns:a16="http://schemas.microsoft.com/office/drawing/2014/main" id="{1651BAD4-1DCA-0414-4611-63945CD71404}"/>
+              </a:ext>
+            </a:extLst>
+          </p:cNvPr>
+          <p:cNvCxnSpPr>
+            <a:cxnSpLocks/>
+          </p:cNvCxnSpPr>
+          <p:nvPr/>
+        </p:nvCxnSpPr>
+        <p:spPr>
+          <a:xfrm>
+            <a:off x="3439636" y="4967610"/>
+            <a:ext cx="320652" cy="0"/>
+          </a:xfrm>
+          <a:prstGeom prst="line">
+            <a:avLst/>
+          </a:prstGeom>
+          <a:ln>
+            <a:solidFill>
+              <a:srgbClr val="00B050"/>
+            </a:solidFill>
+          </a:ln>
+          <a:effectLst>
+            <a:innerShdw blurRad="63500" dist="50800" dir="16200000">
+              <a:prstClr val="black">
+                <a:alpha val="50000"/>
+              </a:prstClr>
+            </a:innerShdw>
+          </a:effectLst>
+        </p:spPr>
+        <p:style>
+          <a:lnRef idx="3">
+            <a:schemeClr val="accent3"/>
+          </a:lnRef>
+          <a:fillRef idx="0">
+            <a:schemeClr val="accent3"/>
+          </a:fillRef>
+          <a:effectRef idx="2">
+            <a:schemeClr val="accent3"/>
+          </a:effectRef>
+          <a:fontRef idx="minor">
+            <a:schemeClr val="tx1"/>
+          </a:fontRef>
+        </p:style>
+      </p:cxnSp>
       <p:grpSp>
         <p:nvGrpSpPr>
           <p:cNvPr id="2" name="Group 2"/>
@@ -3493,7 +3594,7 @@
         </p:nvSpPr>
         <p:spPr>
           <a:xfrm>
-            <a:off x="3785696" y="3442853"/>
+            <a:off x="3760288" y="3611719"/>
             <a:ext cx="15980395" cy="3213290"/>
           </a:xfrm>
           <a:prstGeom prst="rect">
@@ -3515,7 +3616,7 @@
               </a:spcBef>
             </a:pPr>
             <a:r>
-              <a:rPr lang="en-US" sz="2600" b="1">
+              <a:rPr lang="en-US" sz="2600" b="1" dirty="0">
                 <a:solidFill>
                   <a:srgbClr val="5E17EB"/>
                 </a:solidFill>
@@ -3536,7 +3637,7 @@
               <a:buChar char="•"/>
             </a:pPr>
             <a:r>
-              <a:rPr lang="en-US" sz="2400" b="1">
+              <a:rPr lang="en-US" sz="2400" b="1" dirty="0">
                 <a:solidFill>
                   <a:srgbClr val="000000"/>
                 </a:solidFill>
@@ -3557,7 +3658,7 @@
               <a:buChar char="•"/>
             </a:pPr>
             <a:r>
-              <a:rPr lang="en-US" sz="2400" b="1">
+              <a:rPr lang="en-US" sz="2400" b="1" dirty="0">
                 <a:solidFill>
                   <a:srgbClr val="000000"/>
                 </a:solidFill>
@@ -3578,7 +3679,7 @@
               <a:buChar char="•"/>
             </a:pPr>
             <a:r>
-              <a:rPr lang="en-US" sz="2400" b="1">
+              <a:rPr lang="en-US" sz="2400" b="1" dirty="0">
                 <a:solidFill>
                   <a:srgbClr val="000000"/>
                 </a:solidFill>
@@ -3599,7 +3700,7 @@
               <a:buChar char="•"/>
             </a:pPr>
             <a:r>
-              <a:rPr lang="en-US" sz="2400" b="1">
+              <a:rPr lang="en-US" sz="2400" b="1" dirty="0">
                 <a:solidFill>
                   <a:srgbClr val="000000"/>
                 </a:solidFill>
@@ -3620,7 +3721,7 @@
               <a:buChar char="•"/>
             </a:pPr>
             <a:r>
-              <a:rPr lang="en-US" sz="2400" b="1">
+              <a:rPr lang="en-US" sz="2400" b="1" dirty="0">
                 <a:solidFill>
                   <a:srgbClr val="000000"/>
                 </a:solidFill>
@@ -3641,7 +3742,7 @@
               <a:buChar char="•"/>
             </a:pPr>
             <a:r>
-              <a:rPr lang="en-US" sz="2400" b="1">
+              <a:rPr lang="en-US" sz="2400" b="1" dirty="0">
                 <a:solidFill>
                   <a:srgbClr val="000000"/>
                 </a:solidFill>
@@ -3662,7 +3763,7 @@
               <a:buChar char="•"/>
             </a:pPr>
             <a:r>
-              <a:rPr lang="en-US" sz="2400" b="1">
+              <a:rPr lang="en-US" sz="2400" b="1" dirty="0">
                 <a:solidFill>
                   <a:srgbClr val="000000"/>
                 </a:solidFill>
@@ -3683,7 +3784,7 @@
               <a:buChar char="•"/>
             </a:pPr>
             <a:r>
-              <a:rPr lang="en-US" sz="2400" b="1">
+              <a:rPr lang="en-US" sz="2400" b="1" dirty="0">
                 <a:solidFill>
                   <a:srgbClr val="000000"/>
                 </a:solidFill>
@@ -3843,7 +3944,7 @@
               </a:spcBef>
             </a:pPr>
             <a:r>
-              <a:rPr lang="en-US" sz="2799" b="1">
+              <a:rPr lang="en-US" sz="2799" b="1" dirty="0">
                 <a:solidFill>
                   <a:srgbClr val="5E17EB"/>
                 </a:solidFill>
@@ -3887,7 +3988,7 @@
               </a:spcBef>
             </a:pPr>
             <a:r>
-              <a:rPr lang="en-US" sz="2400" b="1">
+              <a:rPr lang="en-US" sz="2400" b="1" dirty="0">
                 <a:solidFill>
                   <a:srgbClr val="5E17EB"/>
                 </a:solidFill>
@@ -3908,7 +4009,7 @@
               <a:buChar char="•"/>
             </a:pPr>
             <a:r>
-              <a:rPr lang="en-US" sz="2400" b="1">
+              <a:rPr lang="en-US" sz="2400" b="1" dirty="0">
                 <a:solidFill>
                   <a:srgbClr val="000000"/>
                 </a:solidFill>
@@ -3929,7 +4030,7 @@
               <a:buChar char="•"/>
             </a:pPr>
             <a:r>
-              <a:rPr lang="en-US" sz="2400" b="1">
+              <a:rPr lang="en-US" sz="2400" b="1" dirty="0">
                 <a:solidFill>
                   <a:srgbClr val="000000"/>
                 </a:solidFill>
@@ -3950,7 +4051,7 @@
               <a:buChar char="•"/>
             </a:pPr>
             <a:r>
-              <a:rPr lang="en-US" sz="2400" b="1">
+              <a:rPr lang="en-US" sz="2400" b="1" dirty="0">
                 <a:solidFill>
                   <a:srgbClr val="000000"/>
                 </a:solidFill>
@@ -3971,7 +4072,7 @@
               <a:buChar char="•"/>
             </a:pPr>
             <a:r>
-              <a:rPr lang="en-US" sz="2400" b="1">
+              <a:rPr lang="en-US" sz="2400" b="1" dirty="0">
                 <a:solidFill>
                   <a:srgbClr val="000000"/>
                 </a:solidFill>
@@ -3980,104 +4081,87 @@
                 <a:cs typeface="Open Sans Bold"/>
                 <a:sym typeface="Open Sans Bold"/>
               </a:rPr>
-              <a:t>“Login”: for simple user verification (though not recommended for credential storage in real production =&gt; SQLite, MySQl the way to go)</a:t>
-            </a:r>
-          </a:p>
-        </p:txBody>
-      </p:sp>
-      <p:sp>
-        <p:nvSpPr>
-          <p:cNvPr id="16" name="AutoShape 16"/>
-          <p:cNvSpPr/>
+              <a:t>“Login”: for simple user verification (though not recommended for credential storage in real production =&gt; SQLite, </a:t>
+            </a:r>
+            <a:r>
+              <a:rPr lang="en-US" sz="2400" b="1" dirty="0" err="1">
+                <a:solidFill>
+                  <a:srgbClr val="000000"/>
+                </a:solidFill>
+                <a:latin typeface="Open Sans Bold"/>
+                <a:ea typeface="Open Sans Bold"/>
+                <a:cs typeface="Open Sans Bold"/>
+                <a:sym typeface="Open Sans Bold"/>
+              </a:rPr>
+              <a:t>MySQl</a:t>
+            </a:r>
+            <a:r>
+              <a:rPr lang="en-US" sz="2400" b="1" dirty="0">
+                <a:solidFill>
+                  <a:srgbClr val="000000"/>
+                </a:solidFill>
+                <a:latin typeface="Open Sans Bold"/>
+                <a:ea typeface="Open Sans Bold"/>
+                <a:cs typeface="Open Sans Bold"/>
+                <a:sym typeface="Open Sans Bold"/>
+              </a:rPr>
+              <a:t> the way to go)</a:t>
+            </a:r>
+          </a:p>
+        </p:txBody>
+      </p:sp>
+      <p:cxnSp>
+        <p:nvCxnSpPr>
+          <p:cNvPr id="26" name="Connector: Elbow 25">
+            <a:extLst>
+              <a:ext uri="{FF2B5EF4-FFF2-40B4-BE49-F238E27FC236}">
+                <a16:creationId xmlns:a16="http://schemas.microsoft.com/office/drawing/2014/main" id="{33E8AF90-7404-9309-7711-576160EDE418}"/>
+              </a:ext>
+            </a:extLst>
+          </p:cNvPr>
+          <p:cNvCxnSpPr>
+            <a:cxnSpLocks/>
+          </p:cNvCxnSpPr>
           <p:nvPr/>
-        </p:nvSpPr>
+        </p:nvCxnSpPr>
         <p:spPr>
-          <a:xfrm flipV="1">
-            <a:off x="625105" y="2914771"/>
-            <a:ext cx="521598" cy="2018903"/>
+          <a:xfrm rot="16200000" flipH="1">
+            <a:off x="1967930" y="6340825"/>
+            <a:ext cx="1261390" cy="968942"/>
           </a:xfrm>
-          <a:prstGeom prst="line">
-            <a:avLst/>
+          <a:prstGeom prst="bentConnector3">
+            <a:avLst>
+              <a:gd name="adj1" fmla="val 47986"/>
+            </a:avLst>
           </a:prstGeom>
-          <a:ln w="38100" cap="flat">
+          <a:ln>
             <a:solidFill>
-              <a:srgbClr val="000000"/>
+              <a:srgbClr val="00B050"/>
             </a:solidFill>
-            <a:prstDash val="solid"/>
-            <a:headEnd type="none" w="sm" len="sm"/>
-            <a:tailEnd type="none" w="sm" len="sm"/>
           </a:ln>
+          <a:effectLst>
+            <a:innerShdw blurRad="63500" dist="50800" dir="16200000">
+              <a:prstClr val="black">
+                <a:alpha val="50000"/>
+              </a:prstClr>
+            </a:innerShdw>
+          </a:effectLst>
         </p:spPr>
-        <p:txBody>
-          <a:bodyPr/>
-          <a:lstStyle/>
-          <a:p>
-            <a:endParaRPr lang="en-US"/>
-          </a:p>
-        </p:txBody>
-      </p:sp>
-      <p:sp>
-        <p:nvSpPr>
-          <p:cNvPr id="17" name="AutoShape 17"/>
-          <p:cNvSpPr/>
-          <p:nvPr/>
-        </p:nvSpPr>
-        <p:spPr>
-          <a:xfrm>
-            <a:off x="3439637" y="5049498"/>
-            <a:ext cx="346059" cy="0"/>
-          </a:xfrm>
-          <a:prstGeom prst="line">
-            <a:avLst/>
-          </a:prstGeom>
-          <a:ln w="38100" cap="flat">
-            <a:solidFill>
-              <a:srgbClr val="000000"/>
-            </a:solidFill>
-            <a:prstDash val="solid"/>
-            <a:headEnd type="none" w="sm" len="sm"/>
-            <a:tailEnd type="none" w="sm" len="sm"/>
-          </a:ln>
-        </p:spPr>
-        <p:txBody>
-          <a:bodyPr/>
-          <a:lstStyle/>
-          <a:p>
-            <a:endParaRPr lang="en-US"/>
-          </a:p>
-        </p:txBody>
-      </p:sp>
-      <p:sp>
-        <p:nvSpPr>
-          <p:cNvPr id="18" name="AutoShape 18"/>
-          <p:cNvSpPr/>
-          <p:nvPr/>
-        </p:nvSpPr>
-        <p:spPr>
-          <a:xfrm>
-            <a:off x="2079059" y="6203300"/>
-            <a:ext cx="3789374" cy="1224367"/>
-          </a:xfrm>
-          <a:prstGeom prst="line">
-            <a:avLst/>
-          </a:prstGeom>
-          <a:ln w="38100" cap="flat">
-            <a:solidFill>
-              <a:srgbClr val="000000"/>
-            </a:solidFill>
-            <a:prstDash val="solid"/>
-            <a:headEnd type="none" w="sm" len="sm"/>
-            <a:tailEnd type="none" w="sm" len="sm"/>
-          </a:ln>
-        </p:spPr>
-        <p:txBody>
-          <a:bodyPr/>
-          <a:lstStyle/>
-          <a:p>
-            <a:endParaRPr lang="en-US"/>
-          </a:p>
-        </p:txBody>
-      </p:sp>
+        <p:style>
+          <a:lnRef idx="3">
+            <a:schemeClr val="accent3"/>
+          </a:lnRef>
+          <a:fillRef idx="0">
+            <a:schemeClr val="accent3"/>
+          </a:fillRef>
+          <a:effectRef idx="2">
+            <a:schemeClr val="accent3"/>
+          </a:effectRef>
+          <a:fontRef idx="minor">
+            <a:schemeClr val="tx1"/>
+          </a:fontRef>
+        </p:style>
+      </p:cxnSp>
     </p:spTree>
   </p:cSld>
   <p:clrMapOvr>
